--- a/ppt/Boolean-operators.pptx
+++ b/ppt/Boolean-operators.pptx
@@ -283,7 +283,7 @@
           <a:p>
             <a:fld id="{F288863F-49AE-0A4A-A5B2-CD589DD03F81}" type="datetimeFigureOut">
               <a:rPr lang="en-US" smtClean="0"/>
-              <a:t>4/16/26</a:t>
+              <a:t>4/18/26</a:t>
             </a:fld>
             <a:endParaRPr lang="en-US"/>
           </a:p>
@@ -483,7 +483,7 @@
           <a:p>
             <a:fld id="{F288863F-49AE-0A4A-A5B2-CD589DD03F81}" type="datetimeFigureOut">
               <a:rPr lang="en-US" smtClean="0"/>
-              <a:t>4/16/26</a:t>
+              <a:t>4/18/26</a:t>
             </a:fld>
             <a:endParaRPr lang="en-US"/>
           </a:p>
@@ -693,7 +693,7 @@
           <a:p>
             <a:fld id="{F288863F-49AE-0A4A-A5B2-CD589DD03F81}" type="datetimeFigureOut">
               <a:rPr lang="en-US" smtClean="0"/>
-              <a:t>4/16/26</a:t>
+              <a:t>4/18/26</a:t>
             </a:fld>
             <a:endParaRPr lang="en-US"/>
           </a:p>
@@ -893,7 +893,7 @@
           <a:p>
             <a:fld id="{F288863F-49AE-0A4A-A5B2-CD589DD03F81}" type="datetimeFigureOut">
               <a:rPr lang="en-US" smtClean="0"/>
-              <a:t>4/16/26</a:t>
+              <a:t>4/18/26</a:t>
             </a:fld>
             <a:endParaRPr lang="en-US"/>
           </a:p>
@@ -1169,7 +1169,7 @@
           <a:p>
             <a:fld id="{F288863F-49AE-0A4A-A5B2-CD589DD03F81}" type="datetimeFigureOut">
               <a:rPr lang="en-US" smtClean="0"/>
-              <a:t>4/16/26</a:t>
+              <a:t>4/18/26</a:t>
             </a:fld>
             <a:endParaRPr lang="en-US"/>
           </a:p>
@@ -1437,7 +1437,7 @@
           <a:p>
             <a:fld id="{F288863F-49AE-0A4A-A5B2-CD589DD03F81}" type="datetimeFigureOut">
               <a:rPr lang="en-US" smtClean="0"/>
-              <a:t>4/16/26</a:t>
+              <a:t>4/18/26</a:t>
             </a:fld>
             <a:endParaRPr lang="en-US"/>
           </a:p>
@@ -1852,7 +1852,7 @@
           <a:p>
             <a:fld id="{F288863F-49AE-0A4A-A5B2-CD589DD03F81}" type="datetimeFigureOut">
               <a:rPr lang="en-US" smtClean="0"/>
-              <a:t>4/16/26</a:t>
+              <a:t>4/18/26</a:t>
             </a:fld>
             <a:endParaRPr lang="en-US"/>
           </a:p>
@@ -1994,7 +1994,7 @@
           <a:p>
             <a:fld id="{F288863F-49AE-0A4A-A5B2-CD589DD03F81}" type="datetimeFigureOut">
               <a:rPr lang="en-US" smtClean="0"/>
-              <a:t>4/16/26</a:t>
+              <a:t>4/18/26</a:t>
             </a:fld>
             <a:endParaRPr lang="en-US"/>
           </a:p>
@@ -2107,7 +2107,7 @@
           <a:p>
             <a:fld id="{F288863F-49AE-0A4A-A5B2-CD589DD03F81}" type="datetimeFigureOut">
               <a:rPr lang="en-US" smtClean="0"/>
-              <a:t>4/16/26</a:t>
+              <a:t>4/18/26</a:t>
             </a:fld>
             <a:endParaRPr lang="en-US"/>
           </a:p>
@@ -2420,7 +2420,7 @@
           <a:p>
             <a:fld id="{F288863F-49AE-0A4A-A5B2-CD589DD03F81}" type="datetimeFigureOut">
               <a:rPr lang="en-US" smtClean="0"/>
-              <a:t>4/16/26</a:t>
+              <a:t>4/18/26</a:t>
             </a:fld>
             <a:endParaRPr lang="en-US"/>
           </a:p>
@@ -2709,7 +2709,7 @@
           <a:p>
             <a:fld id="{F288863F-49AE-0A4A-A5B2-CD589DD03F81}" type="datetimeFigureOut">
               <a:rPr lang="en-US" smtClean="0"/>
-              <a:t>4/16/26</a:t>
+              <a:t>4/18/26</a:t>
             </a:fld>
             <a:endParaRPr lang="en-US"/>
           </a:p>
@@ -2952,7 +2952,7 @@
           <a:p>
             <a:fld id="{F288863F-49AE-0A4A-A5B2-CD589DD03F81}" type="datetimeFigureOut">
               <a:rPr lang="en-US" smtClean="0"/>
-              <a:t>4/16/26</a:t>
+              <a:t>4/18/26</a:t>
             </a:fld>
             <a:endParaRPr lang="en-US"/>
           </a:p>
@@ -8803,7 +8803,7 @@
 </file>
 
 <file path=ppt/slides/slide2.xml><?xml version="1.0" encoding="utf-8"?>
-<p:sld xmlns:a="http://schemas.openxmlformats.org/drawingml/2006/main" xmlns:r="http://schemas.openxmlformats.org/officeDocument/2006/relationships" xmlns:p="http://schemas.openxmlformats.org/presentationml/2006/main" show="0">
+<p:sld xmlns:a="http://schemas.openxmlformats.org/drawingml/2006/main" xmlns:r="http://schemas.openxmlformats.org/officeDocument/2006/relationships" xmlns:p="http://schemas.openxmlformats.org/presentationml/2006/main">
   <p:cSld>
     <p:spTree>
       <p:nvGrpSpPr>
@@ -9085,7 +9085,7 @@
 </file>
 
 <file path=ppt/slides/slide3.xml><?xml version="1.0" encoding="utf-8"?>
-<p:sld xmlns:a="http://schemas.openxmlformats.org/drawingml/2006/main" xmlns:r="http://schemas.openxmlformats.org/officeDocument/2006/relationships" xmlns:p="http://schemas.openxmlformats.org/presentationml/2006/main" show="0">
+<p:sld xmlns:a="http://schemas.openxmlformats.org/drawingml/2006/main" xmlns:r="http://schemas.openxmlformats.org/officeDocument/2006/relationships" xmlns:p="http://schemas.openxmlformats.org/presentationml/2006/main">
   <p:cSld>
     <p:spTree>
       <p:nvGrpSpPr>
@@ -10237,7 +10237,7 @@
 </file>
 
 <file path=ppt/slides/slide4.xml><?xml version="1.0" encoding="utf-8"?>
-<p:sld xmlns:a="http://schemas.openxmlformats.org/drawingml/2006/main" xmlns:r="http://schemas.openxmlformats.org/officeDocument/2006/relationships" xmlns:p="http://schemas.openxmlformats.org/presentationml/2006/main" show="0">
+<p:sld xmlns:a="http://schemas.openxmlformats.org/drawingml/2006/main" xmlns:r="http://schemas.openxmlformats.org/officeDocument/2006/relationships" xmlns:p="http://schemas.openxmlformats.org/presentationml/2006/main">
   <p:cSld>
     <p:spTree>
       <p:nvGrpSpPr>
@@ -12259,7 +12259,7 @@
 </file>
 
 <file path=ppt/slides/slide5.xml><?xml version="1.0" encoding="utf-8"?>
-<p:sld xmlns:a="http://schemas.openxmlformats.org/drawingml/2006/main" xmlns:r="http://schemas.openxmlformats.org/officeDocument/2006/relationships" xmlns:p="http://schemas.openxmlformats.org/presentationml/2006/main" show="0">
+<p:sld xmlns:a="http://schemas.openxmlformats.org/drawingml/2006/main" xmlns:r="http://schemas.openxmlformats.org/officeDocument/2006/relationships" xmlns:p="http://schemas.openxmlformats.org/presentationml/2006/main">
   <p:cSld>
     <p:spTree>
       <p:nvGrpSpPr>
@@ -14964,7 +14964,7 @@
 </file>
 
 <file path=ppt/slides/slide6.xml><?xml version="1.0" encoding="utf-8"?>
-<p:sld xmlns:a="http://schemas.openxmlformats.org/drawingml/2006/main" xmlns:r="http://schemas.openxmlformats.org/officeDocument/2006/relationships" xmlns:p="http://schemas.openxmlformats.org/presentationml/2006/main" show="0">
+<p:sld xmlns:a="http://schemas.openxmlformats.org/drawingml/2006/main" xmlns:r="http://schemas.openxmlformats.org/officeDocument/2006/relationships" xmlns:p="http://schemas.openxmlformats.org/presentationml/2006/main">
   <p:cSld>
     <p:spTree>
       <p:nvGrpSpPr>
